--- a/Stebick-ScoresPresentation.pptx
+++ b/Stebick-ScoresPresentation.pptx
@@ -110,6 +110,11 @@
       </a:defRPr>
     </a:lvl9pPr>
   </p:defaultTextStyle>
+  <p:extLst>
+    <p:ext uri="{EFAFB233-063F-42B5-8137-9DF3F51BA10A}">
+      <p15:sldGuideLst xmlns:p15="http://schemas.microsoft.com/office/powerpoint/2012/main"/>
+    </p:ext>
+  </p:extLst>
 </p:presentation>
 </file>
 
@@ -4118,7 +4123,7 @@
 <dgm:dataModel xmlns:dgm="http://schemas.openxmlformats.org/drawingml/2006/diagram" xmlns:a="http://schemas.openxmlformats.org/drawingml/2006/main">
   <dgm:ptLst>
     <dgm:pt modelId="{7F630468-F4F7-47DD-9489-AD9DB5AC1EA9}" type="doc">
-      <dgm:prSet loTypeId="urn:microsoft.com/office/officeart/2005/8/layout/vList2" loCatId="list" qsTypeId="urn:microsoft.com/office/officeart/2005/8/quickstyle/simple1" qsCatId="simple" csTypeId="urn:microsoft.com/office/officeart/2005/8/colors/accent1_5" csCatId="accent1"/>
+      <dgm:prSet loTypeId="urn:microsoft.com/office/officeart/2005/8/layout/vList2" loCatId="list" qsTypeId="urn:microsoft.com/office/officeart/2005/8/quickstyle/simple1" qsCatId="simple" csTypeId="urn:microsoft.com/office/officeart/2005/8/colors/accent1_5" csCatId="accent1" phldr="1"/>
       <dgm:spPr/>
       <dgm:t>
         <a:bodyPr/>
@@ -4172,8 +4177,8 @@
         <a:lstStyle/>
         <a:p>
           <a:r>
-            <a:rPr lang="en-US"/>
-            <a:t>How much can statistics take?</a:t>
+            <a:rPr lang="en-US" dirty="0"/>
+            <a:t>Impact on Statistics</a:t>
           </a:r>
         </a:p>
       </dgm:t>
@@ -5489,8 +5494,8 @@
       </dsp:nvSpPr>
       <dsp:spPr>
         <a:xfrm>
-          <a:off x="0" y="19326"/>
-          <a:ext cx="6207841" cy="1747906"/>
+          <a:off x="0" y="46086"/>
+          <a:ext cx="6207841" cy="1867082"/>
         </a:xfrm>
         <a:prstGeom prst="roundRect">
           <a:avLst/>
@@ -5533,12 +5538,12 @@
         </a:fontRef>
       </dsp:style>
       <dsp:txBody>
-        <a:bodyPr spcFirstLastPara="0" vert="horz" wrap="square" lIns="167640" tIns="167640" rIns="167640" bIns="167640" numCol="1" spcCol="1270" anchor="ctr" anchorCtr="0">
+        <a:bodyPr spcFirstLastPara="0" vert="horz" wrap="square" lIns="179070" tIns="179070" rIns="179070" bIns="179070" numCol="1" spcCol="1270" anchor="ctr" anchorCtr="0">
           <a:noAutofit/>
         </a:bodyPr>
         <a:lstStyle/>
         <a:p>
-          <a:pPr marL="0" lvl="0" indent="0" algn="l" defTabSz="1955800">
+          <a:pPr marL="0" lvl="0" indent="0" algn="l" defTabSz="2089150">
             <a:lnSpc>
               <a:spcPct val="90000"/>
             </a:lnSpc>
@@ -5551,14 +5556,14 @@
             <a:buNone/>
           </a:pPr>
           <a:r>
-            <a:rPr lang="en-US" sz="4400" kern="1200"/>
+            <a:rPr lang="en-US" sz="4700" kern="1200"/>
             <a:t>1 in 9.2 Quintillion</a:t>
           </a:r>
         </a:p>
       </dsp:txBody>
       <dsp:txXfrm>
-        <a:off x="85326" y="104652"/>
-        <a:ext cx="6037189" cy="1577254"/>
+        <a:off x="91143" y="137229"/>
+        <a:ext cx="6025555" cy="1684796"/>
       </dsp:txXfrm>
     </dsp:sp>
     <dsp:sp modelId="{0BC2B00C-4A65-934B-A7BB-B9CED778D991}">
@@ -5568,8 +5573,8 @@
       </dsp:nvSpPr>
       <dsp:spPr>
         <a:xfrm>
-          <a:off x="0" y="1767233"/>
-          <a:ext cx="6207841" cy="1070190"/>
+          <a:off x="0" y="1913168"/>
+          <a:ext cx="6207841" cy="778320"/>
         </a:xfrm>
         <a:prstGeom prst="rect">
           <a:avLst/>
@@ -5593,12 +5598,12 @@
         <a:fontRef idx="minor"/>
       </dsp:style>
       <dsp:txBody>
-        <a:bodyPr spcFirstLastPara="0" vert="horz" wrap="square" lIns="197099" tIns="55880" rIns="312928" bIns="55880" numCol="1" spcCol="1270" anchor="t" anchorCtr="0">
+        <a:bodyPr spcFirstLastPara="0" vert="horz" wrap="square" lIns="197099" tIns="59690" rIns="334264" bIns="59690" numCol="1" spcCol="1270" anchor="t" anchorCtr="0">
           <a:noAutofit/>
         </a:bodyPr>
         <a:lstStyle/>
         <a:p>
-          <a:pPr marL="285750" lvl="1" indent="-285750" algn="l" defTabSz="1511300">
+          <a:pPr marL="285750" lvl="1" indent="-285750" algn="l" defTabSz="1644650">
             <a:lnSpc>
               <a:spcPct val="90000"/>
             </a:lnSpc>
@@ -5611,14 +5616,14 @@
             <a:buChar char="•"/>
           </a:pPr>
           <a:r>
-            <a:rPr lang="en-US" sz="3400" kern="1200"/>
-            <a:t>How much can statistics take?</a:t>
+            <a:rPr lang="en-US" sz="3700" kern="1200" dirty="0"/>
+            <a:t>Impact on Statistics</a:t>
           </a:r>
         </a:p>
       </dsp:txBody>
       <dsp:txXfrm>
-        <a:off x="0" y="1767233"/>
-        <a:ext cx="6207841" cy="1070190"/>
+        <a:off x="0" y="1913168"/>
+        <a:ext cx="6207841" cy="778320"/>
       </dsp:txXfrm>
     </dsp:sp>
     <dsp:sp modelId="{3677BA96-7487-9348-ACC6-705072D2DF16}">
@@ -5628,8 +5633,8 @@
       </dsp:nvSpPr>
       <dsp:spPr>
         <a:xfrm>
-          <a:off x="0" y="2837423"/>
-          <a:ext cx="6207841" cy="1747906"/>
+          <a:off x="0" y="2691488"/>
+          <a:ext cx="6207841" cy="1867082"/>
         </a:xfrm>
         <a:prstGeom prst="roundRect">
           <a:avLst/>
@@ -5672,12 +5677,12 @@
         </a:fontRef>
       </dsp:style>
       <dsp:txBody>
-        <a:bodyPr spcFirstLastPara="0" vert="horz" wrap="square" lIns="167640" tIns="167640" rIns="167640" bIns="167640" numCol="1" spcCol="1270" anchor="ctr" anchorCtr="0">
+        <a:bodyPr spcFirstLastPara="0" vert="horz" wrap="square" lIns="179070" tIns="179070" rIns="179070" bIns="179070" numCol="1" spcCol="1270" anchor="ctr" anchorCtr="0">
           <a:noAutofit/>
         </a:bodyPr>
         <a:lstStyle/>
         <a:p>
-          <a:pPr marL="0" lvl="0" indent="0" algn="l" defTabSz="1955800">
+          <a:pPr marL="0" lvl="0" indent="0" algn="l" defTabSz="2089150">
             <a:lnSpc>
               <a:spcPct val="90000"/>
             </a:lnSpc>
@@ -5690,14 +5695,14 @@
             <a:buNone/>
           </a:pPr>
           <a:r>
-            <a:rPr lang="en-US" sz="4400" kern="1200"/>
+            <a:rPr lang="en-US" sz="4700" kern="1200"/>
             <a:t>Timing of March Madness</a:t>
           </a:r>
         </a:p>
       </dsp:txBody>
       <dsp:txXfrm>
-        <a:off x="85326" y="2922749"/>
-        <a:ext cx="6037189" cy="1577254"/>
+        <a:off x="91143" y="2782631"/>
+        <a:ext cx="6025555" cy="1684796"/>
       </dsp:txXfrm>
     </dsp:sp>
   </dsp:spTree>
@@ -13559,7 +13564,7 @@
           <a:p>
             <a:fld id="{A1E45834-53BD-4C8F-B791-CD5378F4150E}" type="datetimeFigureOut">
               <a:rPr lang="en-US" smtClean="0"/>
-              <a:t>4/26/26</a:t>
+              <a:t>4/27/26</a:t>
             </a:fld>
             <a:endParaRPr lang="en-US"/>
           </a:p>
@@ -13757,7 +13762,7 @@
           <a:p>
             <a:fld id="{A1E45834-53BD-4C8F-B791-CD5378F4150E}" type="datetimeFigureOut">
               <a:rPr lang="en-US" smtClean="0"/>
-              <a:t>4/26/26</a:t>
+              <a:t>4/27/26</a:t>
             </a:fld>
             <a:endParaRPr lang="en-US"/>
           </a:p>
@@ -13965,7 +13970,7 @@
           <a:p>
             <a:fld id="{A1E45834-53BD-4C8F-B791-CD5378F4150E}" type="datetimeFigureOut">
               <a:rPr lang="en-US" smtClean="0"/>
-              <a:t>4/26/26</a:t>
+              <a:t>4/27/26</a:t>
             </a:fld>
             <a:endParaRPr lang="en-US"/>
           </a:p>
@@ -14206,7 +14211,7 @@
           <a:p>
             <a:fld id="{A1E45834-53BD-4C8F-B791-CD5378F4150E}" type="datetimeFigureOut">
               <a:rPr lang="en-US" smtClean="0"/>
-              <a:t>4/26/26</a:t>
+              <a:t>4/27/26</a:t>
             </a:fld>
             <a:endParaRPr lang="en-US"/>
           </a:p>
@@ -14484,7 +14489,7 @@
           <a:p>
             <a:fld id="{A1E45834-53BD-4C8F-B791-CD5378F4150E}" type="datetimeFigureOut">
               <a:rPr lang="en-US" smtClean="0"/>
-              <a:t>4/26/26</a:t>
+              <a:t>4/27/26</a:t>
             </a:fld>
             <a:endParaRPr lang="en-US"/>
           </a:p>
@@ -14754,7 +14759,7 @@
           <a:p>
             <a:fld id="{A1E45834-53BD-4C8F-B791-CD5378F4150E}" type="datetimeFigureOut">
               <a:rPr lang="en-US" smtClean="0"/>
-              <a:t>4/26/26</a:t>
+              <a:t>4/27/26</a:t>
             </a:fld>
             <a:endParaRPr lang="en-US"/>
           </a:p>
@@ -15176,7 +15181,7 @@
           <a:p>
             <a:fld id="{A1E45834-53BD-4C8F-B791-CD5378F4150E}" type="datetimeFigureOut">
               <a:rPr lang="en-US" smtClean="0"/>
-              <a:t>4/26/26</a:t>
+              <a:t>4/27/26</a:t>
             </a:fld>
             <a:endParaRPr lang="en-US"/>
           </a:p>
@@ -15321,7 +15326,7 @@
           <a:p>
             <a:fld id="{A1E45834-53BD-4C8F-B791-CD5378F4150E}" type="datetimeFigureOut">
               <a:rPr lang="en-US" smtClean="0"/>
-              <a:t>4/26/26</a:t>
+              <a:t>4/27/26</a:t>
             </a:fld>
             <a:endParaRPr lang="en-US"/>
           </a:p>
@@ -15434,7 +15439,7 @@
           <a:p>
             <a:fld id="{A1E45834-53BD-4C8F-B791-CD5378F4150E}" type="datetimeFigureOut">
               <a:rPr lang="en-US" smtClean="0"/>
-              <a:t>4/26/26</a:t>
+              <a:t>4/27/26</a:t>
             </a:fld>
             <a:endParaRPr lang="en-US"/>
           </a:p>
@@ -15748,7 +15753,7 @@
           <a:p>
             <a:fld id="{A1E45834-53BD-4C8F-B791-CD5378F4150E}" type="datetimeFigureOut">
               <a:rPr lang="en-US" smtClean="0"/>
-              <a:t>4/26/26</a:t>
+              <a:t>4/27/26</a:t>
             </a:fld>
             <a:endParaRPr lang="en-US"/>
           </a:p>
@@ -16042,7 +16047,7 @@
           <a:p>
             <a:fld id="{A1E45834-53BD-4C8F-B791-CD5378F4150E}" type="datetimeFigureOut">
               <a:rPr lang="en-US" smtClean="0"/>
-              <a:t>4/26/26</a:t>
+              <a:t>4/27/26</a:t>
             </a:fld>
             <a:endParaRPr lang="en-US"/>
           </a:p>
@@ -16281,7 +16286,7 @@
           <a:p>
             <a:fld id="{A1E45834-53BD-4C8F-B791-CD5378F4150E}" type="datetimeFigureOut">
               <a:rPr lang="en-US" smtClean="0"/>
-              <a:t>4/26/26</a:t>
+              <a:t>4/27/26</a:t>
             </a:fld>
             <a:endParaRPr lang="en-US"/>
           </a:p>
@@ -16856,6 +16861,9 @@
             <a:br>
               <a:rPr lang="en-US" sz="4000" dirty="0"/>
             </a:br>
+            <a:br>
+              <a:rPr lang="en-US" sz="4000" dirty="0"/>
+            </a:br>
             <a:r>
               <a:rPr lang="en-US" sz="2000" i="1" dirty="0"/>
               <a:t>An insight to March Madness</a:t>
@@ -16894,7 +16902,7 @@
           <a:p>
             <a:r>
               <a:rPr lang="en-US" dirty="0"/>
-              <a:t>-Jonathan Stebick</a:t>
+              <a:t>- Jonathan Stebick ‘26</a:t>
             </a:r>
           </a:p>
         </p:txBody>
@@ -16966,7 +16974,41 @@
           <p:nvPr/>
         </p:nvPicPr>
         <p:blipFill>
-          <a:blip r:embed="rId2"/>
+          <a:blip r:embed="rId2">
+            <a:clrChange>
+              <a:clrFrom>
+                <a:srgbClr val="FFEEE1"/>
+              </a:clrFrom>
+              <a:clrTo>
+                <a:srgbClr val="FFEEE1">
+                  <a:alpha val="0"/>
+                </a:srgbClr>
+              </a:clrTo>
+            </a:clrChange>
+            <a:duotone>
+              <a:prstClr val="black"/>
+              <a:schemeClr val="accent1">
+                <a:lumMod val="40000"/>
+                <a:lumOff val="60000"/>
+                <a:tint val="45000"/>
+                <a:satMod val="400000"/>
+              </a:schemeClr>
+            </a:duotone>
+            <a:extLst>
+              <a:ext uri="{BEBA8EAE-BF5A-486C-A8C5-ECC9F3942E4B}">
+                <a14:imgProps xmlns:a14="http://schemas.microsoft.com/office/drawing/2010/main">
+                  <a14:imgLayer r:embed="rId3">
+                    <a14:imgEffect>
+                      <a14:colorTemperature colorTemp="4700"/>
+                    </a14:imgEffect>
+                    <a14:imgEffect>
+                      <a14:saturation sat="400000"/>
+                    </a14:imgEffect>
+                  </a14:imgLayer>
+                </a14:imgProps>
+              </a:ext>
+            </a:extLst>
+          </a:blip>
           <a:srcRect l="11761" r="30150" b="2"/>
           <a:stretch>
             <a:fillRect/>
@@ -16974,7 +17016,7 @@
         </p:blipFill>
         <p:spPr>
           <a:xfrm>
-            <a:off x="5524500" y="1"/>
+            <a:off x="5524499" y="1"/>
             <a:ext cx="6667501" cy="6857999"/>
           </a:xfrm>
           <a:prstGeom prst="rect">
@@ -17199,7 +17241,7 @@
             <p:ph idx="1"/>
             <p:extLst>
               <p:ext uri="{D42A27DB-BD31-4B8C-83A1-F6EECF244321}">
-                <p14:modId xmlns:p14="http://schemas.microsoft.com/office/powerpoint/2010/main" val="3833383408"/>
+                <p14:modId xmlns:p14="http://schemas.microsoft.com/office/powerpoint/2010/main" val="1840267422"/>
               </p:ext>
             </p:extLst>
           </p:nvPr>
